--- a/site/clases/parte-2-deep-learning/153-mcp-model-context-protocol/clase-153-mcp-model-context-protocol-presentacion.pptx
+++ b/site/clases/parte-2-deep-learning/153-mcp-model-context-protocol/clase-153-mcp-model-context-protocol-presentacion.pptx
@@ -3272,7 +3272,7 @@
                 </a:solidFill>
                 <a:latin typeface="Segoe UI"/>
               </a:rPr>
-              <a:t>Parte: 2 — Deep Learning · Fuente: MCP spec (Anthropic 2024).  Duración estimada: 80 min.</a:t>
+              <a:t>Parte: 2 — Deep Learning · Fuente: MCP spec (Anthropic 2024).  Duración estimada: 80 min. · Nivel: Avanzado</a:t>
             </a:r>
           </a:p>
         </p:txBody>
@@ -3581,7 +3581,7 @@
                 </a:solidFill>
                 <a:latin typeface="Segoe UI"/>
               </a:rPr>
-              <a:t>Parte: 2 — Deep Learning · Fuente: MCP spec (Anthropic 2024).  Duración estimada: 80 min.</a:t>
+              <a:t>Parte: 2 — Deep Learning · Fuente: MCP spec (Anthropic 2024).  Duración estimada: 80 min. · Nivel: Avanzado</a:t>
             </a:r>
           </a:p>
         </p:txBody>
@@ -5500,7 +5500,7 @@
                 </a:solidFill>
                 <a:latin typeface="Segoe UI"/>
               </a:rPr>
-              <a:t>• fastmcp con tool search(query) que usa el RAG de clase 129.</a:t>
+              <a:t>• fastmcp con tool search(query) que usa el RAG de clase 152.</a:t>
             </a:r>
           </a:p>
           <a:p>
